--- a/货袋子平台销售培训.pptx
+++ b/货袋子平台销售培训.pptx
@@ -27407,7 +27407,7 @@
                 </a:solidFill>
                 <a:latin typeface="Microsoft YaHei"/>
               </a:rPr>
-              <a:t>17 个高频异议，抽考 8 条</a:t>
+              <a:t>18 个高频异议，抽考 8 条</a:t>
             </a:r>
           </a:p>
         </p:txBody>
@@ -27446,7 +27446,7 @@
                 </a:solidFill>
                 <a:latin typeface="Microsoft YaHei"/>
               </a:rPr>
-              <a:t>第 1、2、4、5、8 条必考</a:t>
+              <a:t>第 1、2、4、5、8、18 条必考</a:t>
             </a:r>
           </a:p>
         </p:txBody>
@@ -27752,7 +27752,7 @@
                 </a:solidFill>
                 <a:latin typeface="Microsoft YaHei"/>
               </a:rPr>
-              <a:t>高频异议标准答案　1—5 / 17</a:t>
+              <a:t>高频异议标准答案　1—5 / 18</a:t>
             </a:r>
           </a:p>
         </p:txBody>
@@ -29222,7 +29222,7 @@
                 </a:solidFill>
                 <a:latin typeface="Microsoft YaHei"/>
               </a:rPr>
-              <a:t>高频异议标准答案　6—10 / 17</a:t>
+              <a:t>高频异议标准答案　6—10 / 18</a:t>
             </a:r>
           </a:p>
         </p:txBody>
@@ -30692,7 +30692,7 @@
                 </a:solidFill>
                 <a:latin typeface="Microsoft YaHei"/>
               </a:rPr>
-              <a:t>高频异议标准答案　11—15 / 17</a:t>
+              <a:t>高频异议标准答案　11—15 / 18</a:t>
             </a:r>
           </a:p>
         </p:txBody>
@@ -32162,7 +32162,7 @@
                 </a:solidFill>
                 <a:latin typeface="Microsoft YaHei"/>
               </a:rPr>
-              <a:t>高频异议标准答案　16—17 / 17</a:t>
+              <a:t>高频异议标准答案　16—18 / 18</a:t>
             </a:r>
           </a:p>
         </p:txBody>
@@ -32619,7 +32619,232 @@
       </p:sp>
       <p:sp>
         <p:nvSpPr>
-          <p:cNvPr id="16" name="TextBox 15"/>
+          <p:cNvPr id="16" name="Rectangle 15"/>
+          <p:cNvSpPr/>
+          <p:nvPr/>
+        </p:nvSpPr>
+        <p:spPr>
+          <a:xfrm>
+            <a:off x="822960" y="3383280"/>
+            <a:ext cx="10561320" cy="914400"/>
+          </a:xfrm>
+          <a:prstGeom prst="rect">
+            <a:avLst/>
+          </a:prstGeom>
+          <a:solidFill>
+            <a:srgbClr val="FFFFFF"/>
+          </a:solidFill>
+          <a:ln w="19050">
+            <a:solidFill>
+              <a:srgbClr val="F26A21"/>
+            </a:solidFill>
+          </a:ln>
+          <a:effectLst/>
+        </p:spPr>
+        <p:style>
+          <a:lnRef idx="1">
+            <a:schemeClr val="accent1"/>
+          </a:lnRef>
+          <a:fillRef idx="3">
+            <a:schemeClr val="accent1"/>
+          </a:fillRef>
+          <a:effectRef idx="2">
+            <a:schemeClr val="accent1"/>
+          </a:effectRef>
+          <a:fontRef idx="minor">
+            <a:schemeClr val="lt1"/>
+          </a:fontRef>
+        </p:style>
+        <p:txBody>
+          <a:bodyPr rtlCol="0" anchor="ctr"/>
+          <a:lstStyle/>
+          <a:p>
+            <a:pPr algn="ctr"/>
+          </a:p>
+        </p:txBody>
+      </p:sp>
+      <p:sp>
+        <p:nvSpPr>
+          <p:cNvPr id="17" name="Rectangle 16"/>
+          <p:cNvSpPr/>
+          <p:nvPr/>
+        </p:nvSpPr>
+        <p:spPr>
+          <a:xfrm>
+            <a:off x="822960" y="3383280"/>
+            <a:ext cx="50292" cy="914400"/>
+          </a:xfrm>
+          <a:prstGeom prst="rect">
+            <a:avLst/>
+          </a:prstGeom>
+          <a:solidFill>
+            <a:srgbClr val="F26A21"/>
+          </a:solidFill>
+          <a:ln>
+            <a:noFill/>
+          </a:ln>
+          <a:effectLst/>
+        </p:spPr>
+        <p:style>
+          <a:lnRef idx="1">
+            <a:schemeClr val="accent1"/>
+          </a:lnRef>
+          <a:fillRef idx="3">
+            <a:schemeClr val="accent1"/>
+          </a:fillRef>
+          <a:effectRef idx="2">
+            <a:schemeClr val="accent1"/>
+          </a:effectRef>
+          <a:fontRef idx="minor">
+            <a:schemeClr val="lt1"/>
+          </a:fontRef>
+        </p:style>
+        <p:txBody>
+          <a:bodyPr rtlCol="0" anchor="ctr"/>
+          <a:lstStyle/>
+          <a:p>
+            <a:pPr algn="ctr"/>
+          </a:p>
+        </p:txBody>
+      </p:sp>
+      <p:sp>
+        <p:nvSpPr>
+          <p:cNvPr id="18" name="TextBox 17"/>
+          <p:cNvSpPr txBox="1"/>
+          <p:nvPr/>
+        </p:nvSpPr>
+        <p:spPr>
+          <a:xfrm>
+            <a:off x="969264" y="3493008"/>
+            <a:ext cx="384048" cy="274320"/>
+          </a:xfrm>
+          <a:prstGeom prst="rect">
+            <a:avLst/>
+          </a:prstGeom>
+          <a:noFill/>
+        </p:spPr>
+        <p:txBody>
+          <a:bodyPr wrap="square" anchor="t" lIns="0" rIns="0" tIns="0" bIns="0">
+            <a:spAutoFit/>
+          </a:bodyPr>
+          <a:lstStyle/>
+          <a:p>
+            <a:pPr algn="l">
+              <a:lnSpc>
+                <a:spcPct val="125000"/>
+              </a:lnSpc>
+            </a:pPr>
+            <a:r>
+              <a:rPr sz="1500" b="1" i="0">
+                <a:solidFill>
+                  <a:srgbClr val="F26A21"/>
+                </a:solidFill>
+                <a:latin typeface="Microsoft YaHei"/>
+              </a:rPr>
+              <a:t>18</a:t>
+            </a:r>
+          </a:p>
+        </p:txBody>
+      </p:sp>
+      <p:sp>
+        <p:nvSpPr>
+          <p:cNvPr id="19" name="TextBox 18"/>
+          <p:cNvSpPr txBox="1"/>
+          <p:nvPr/>
+        </p:nvSpPr>
+        <p:spPr>
+          <a:xfrm>
+            <a:off x="1444752" y="3474720"/>
+            <a:ext cx="9784080" cy="292608"/>
+          </a:xfrm>
+          <a:prstGeom prst="rect">
+            <a:avLst/>
+          </a:prstGeom>
+          <a:noFill/>
+        </p:spPr>
+        <p:txBody>
+          <a:bodyPr wrap="square" anchor="t" lIns="0" rIns="0" tIns="0" bIns="0">
+            <a:spAutoFit/>
+          </a:bodyPr>
+          <a:lstStyle/>
+          <a:p>
+            <a:pPr algn="l">
+              <a:lnSpc>
+                <a:spcPct val="125000"/>
+              </a:lnSpc>
+            </a:pPr>
+            <a:r>
+              <a:rPr sz="1350" b="1" i="0">
+                <a:solidFill>
+                  <a:srgbClr val="5A6B7B"/>
+                </a:solidFill>
+                <a:latin typeface="Microsoft YaHei"/>
+              </a:rPr>
+              <a:t>Q：</a:t>
+            </a:r>
+            <a:r>
+              <a:rPr sz="1350" b="1" i="0">
+                <a:solidFill>
+                  <a:srgbClr val="0F2B46"/>
+                </a:solidFill>
+                <a:latin typeface="Microsoft YaHei"/>
+              </a:rPr>
+              <a:t>我的客户扫码进来会看到别家，私域客户不就流失了？</a:t>
+            </a:r>
+            <a:r>
+              <a:rPr sz="1350" b="0" i="0">
+                <a:solidFill>
+                  <a:srgbClr val="F26A21"/>
+                </a:solidFill>
+                <a:latin typeface="Microsoft YaHei"/>
+              </a:rPr>
+              <a:t>　［结构性·必考］</a:t>
+            </a:r>
+          </a:p>
+        </p:txBody>
+      </p:sp>
+      <p:sp>
+        <p:nvSpPr>
+          <p:cNvPr id="20" name="TextBox 19"/>
+          <p:cNvSpPr txBox="1"/>
+          <p:nvPr/>
+        </p:nvSpPr>
+        <p:spPr>
+          <a:xfrm>
+            <a:off x="1444752" y="3785616"/>
+            <a:ext cx="9802368" cy="475488"/>
+          </a:xfrm>
+          <a:prstGeom prst="rect">
+            <a:avLst/>
+          </a:prstGeom>
+          <a:noFill/>
+        </p:spPr>
+        <p:txBody>
+          <a:bodyPr wrap="square" anchor="t" lIns="0" rIns="0" tIns="0" bIns="0">
+            <a:spAutoFit/>
+          </a:bodyPr>
+          <a:lstStyle/>
+          <a:p>
+            <a:pPr algn="l">
+              <a:lnSpc>
+                <a:spcPct val="124000"/>
+              </a:lnSpc>
+            </a:pPr>
+            <a:r>
+              <a:rPr sz="1130" b="0" i="0">
+                <a:solidFill>
+                  <a:srgbClr val="1D2A36"/>
+                </a:solidFill>
+                <a:latin typeface="Microsoft YaHei"/>
+              </a:rPr>
+              <a:t>A：不许硬辩解。先承认“这担心是对的”，再讲两条现在成立的事实：① 您的老客户现在也在比价，您不给看他也在看，真正决定成交的是他觉不觉得跟您买更稳；② 海报是拓新客的工具，不是发给老客户的（这是我们没讲清楚）。并主动告知产品正在做专属落地页与归属锁定。</a:t>
+            </a:r>
+          </a:p>
+        </p:txBody>
+      </p:sp>
+      <p:sp>
+        <p:nvSpPr>
+          <p:cNvPr id="21" name="TextBox 20"/>
           <p:cNvSpPr txBox="1"/>
           <p:nvPr/>
         </p:nvSpPr>
@@ -32658,7 +32883,7 @@
       </p:sp>
       <p:sp>
         <p:nvSpPr>
-          <p:cNvPr id="17" name="Rectangle 16"/>
+          <p:cNvPr id="22" name="Rectangle 21"/>
           <p:cNvSpPr/>
           <p:nvPr/>
         </p:nvSpPr>
@@ -32702,7 +32927,7 @@
       </p:sp>
       <p:sp>
         <p:nvSpPr>
-          <p:cNvPr id="18" name="TextBox 17"/>
+          <p:cNvPr id="23" name="TextBox 22"/>
           <p:cNvSpPr txBox="1"/>
           <p:nvPr/>
         </p:nvSpPr>
@@ -32741,7 +32966,7 @@
       </p:sp>
       <p:sp>
         <p:nvSpPr>
-          <p:cNvPr id="19" name="TextBox 18"/>
+          <p:cNvPr id="24" name="TextBox 23"/>
           <p:cNvSpPr txBox="1"/>
           <p:nvPr/>
         </p:nvSpPr>
@@ -35803,7 +36028,7 @@
                 </a:solidFill>
                 <a:latin typeface="Microsoft YaHei"/>
               </a:rPr>
-              <a:t>17 条异议抽考 8 条（1/2/4/5/8 必考）</a:t>
+              <a:t>18 条异议抽考 8 条（1/2/4/5/8/18 必考）</a:t>
             </a:r>
           </a:p>
           <a:p>
@@ -36579,7 +36804,7 @@
                 </a:solidFill>
                 <a:latin typeface="Microsoft YaHei"/>
               </a:rPr>
-              <a:t>9 条销售红线（违反即追责）</a:t>
+              <a:t>10 条销售红线（违反即追责）</a:t>
             </a:r>
           </a:p>
         </p:txBody>
@@ -38104,6 +38329,174 @@
         </p:nvSpPr>
         <p:spPr>
           <a:xfrm>
+            <a:off x="6263640" y="4005072"/>
+            <a:ext cx="5120640" cy="548640"/>
+          </a:xfrm>
+          <a:prstGeom prst="rect">
+            <a:avLst/>
+          </a:prstGeom>
+          <a:solidFill>
+            <a:srgbClr val="F4F6F9"/>
+          </a:solidFill>
+          <a:ln w="11430">
+            <a:solidFill>
+              <a:srgbClr val="D8DFE7"/>
+            </a:solidFill>
+          </a:ln>
+          <a:effectLst/>
+        </p:spPr>
+        <p:style>
+          <a:lnRef idx="1">
+            <a:schemeClr val="accent1"/>
+          </a:lnRef>
+          <a:fillRef idx="3">
+            <a:schemeClr val="accent1"/>
+          </a:fillRef>
+          <a:effectRef idx="2">
+            <a:schemeClr val="accent1"/>
+          </a:effectRef>
+          <a:fontRef idx="minor">
+            <a:schemeClr val="lt1"/>
+          </a:fontRef>
+        </p:style>
+        <p:txBody>
+          <a:bodyPr rtlCol="0" anchor="ctr"/>
+          <a:lstStyle/>
+          <a:p>
+            <a:pPr algn="ctr"/>
+          </a:p>
+        </p:txBody>
+      </p:sp>
+      <p:sp>
+        <p:nvSpPr>
+          <p:cNvPr id="43" name="Rectangle 42"/>
+          <p:cNvSpPr/>
+          <p:nvPr/>
+        </p:nvSpPr>
+        <p:spPr>
+          <a:xfrm>
+            <a:off x="6263640" y="4005072"/>
+            <a:ext cx="45720" cy="548640"/>
+          </a:xfrm>
+          <a:prstGeom prst="rect">
+            <a:avLst/>
+          </a:prstGeom>
+          <a:solidFill>
+            <a:srgbClr val="C0392B"/>
+          </a:solidFill>
+          <a:ln>
+            <a:noFill/>
+          </a:ln>
+          <a:effectLst/>
+        </p:spPr>
+        <p:style>
+          <a:lnRef idx="1">
+            <a:schemeClr val="accent1"/>
+          </a:lnRef>
+          <a:fillRef idx="3">
+            <a:schemeClr val="accent1"/>
+          </a:fillRef>
+          <a:effectRef idx="2">
+            <a:schemeClr val="accent1"/>
+          </a:effectRef>
+          <a:fontRef idx="minor">
+            <a:schemeClr val="lt1"/>
+          </a:fontRef>
+        </p:style>
+        <p:txBody>
+          <a:bodyPr rtlCol="0" anchor="ctr"/>
+          <a:lstStyle/>
+          <a:p>
+            <a:pPr algn="ctr"/>
+          </a:p>
+        </p:txBody>
+      </p:sp>
+      <p:sp>
+        <p:nvSpPr>
+          <p:cNvPr id="44" name="TextBox 43"/>
+          <p:cNvSpPr txBox="1"/>
+          <p:nvPr/>
+        </p:nvSpPr>
+        <p:spPr>
+          <a:xfrm>
+            <a:off x="6446520" y="4133088"/>
+            <a:ext cx="320040" cy="274320"/>
+          </a:xfrm>
+          <a:prstGeom prst="rect">
+            <a:avLst/>
+          </a:prstGeom>
+          <a:noFill/>
+        </p:spPr>
+        <p:txBody>
+          <a:bodyPr wrap="square" anchor="t" lIns="0" rIns="0" tIns="0" bIns="0">
+            <a:spAutoFit/>
+          </a:bodyPr>
+          <a:lstStyle/>
+          <a:p>
+            <a:pPr algn="l">
+              <a:lnSpc>
+                <a:spcPct val="125000"/>
+              </a:lnSpc>
+            </a:pPr>
+            <a:r>
+              <a:rPr sz="1400" b="1" i="0">
+                <a:solidFill>
+                  <a:srgbClr val="C0392B"/>
+                </a:solidFill>
+                <a:latin typeface="Microsoft YaHei"/>
+              </a:rPr>
+              <a:t>10</a:t>
+            </a:r>
+          </a:p>
+        </p:txBody>
+      </p:sp>
+      <p:sp>
+        <p:nvSpPr>
+          <p:cNvPr id="45" name="TextBox 44"/>
+          <p:cNvSpPr txBox="1"/>
+          <p:nvPr/>
+        </p:nvSpPr>
+        <p:spPr>
+          <a:xfrm>
+            <a:off x="6830568" y="4087368"/>
+            <a:ext cx="4434840" cy="411480"/>
+          </a:xfrm>
+          <a:prstGeom prst="rect">
+            <a:avLst/>
+          </a:prstGeom>
+          <a:noFill/>
+        </p:spPr>
+        <p:txBody>
+          <a:bodyPr wrap="square" anchor="t" lIns="0" rIns="0" tIns="0" bIns="0">
+            <a:spAutoFit/>
+          </a:bodyPr>
+          <a:lstStyle/>
+          <a:p>
+            <a:pPr algn="l">
+              <a:lnSpc>
+                <a:spcPct val="122000"/>
+              </a:lnSpc>
+            </a:pPr>
+            <a:r>
+              <a:rPr sz="1180" b="0" i="0">
+                <a:solidFill>
+                  <a:srgbClr val="1D2A36"/>
+                </a:solidFill>
+                <a:latin typeface="Microsoft YaHei"/>
+              </a:rPr>
+              <a:t>不许宣称产品尚未具备的能力 —— 尤其“扫码只进您自己的店”，上线前一律不许说。</a:t>
+            </a:r>
+          </a:p>
+        </p:txBody>
+      </p:sp>
+      <p:sp>
+        <p:nvSpPr>
+          <p:cNvPr id="46" name="Rectangle 45"/>
+          <p:cNvSpPr/>
+          <p:nvPr/>
+        </p:nvSpPr>
+        <p:spPr>
+          <a:xfrm>
             <a:off x="0" y="6473952"/>
             <a:ext cx="12191695" cy="15240"/>
           </a:xfrm>
@@ -38142,7 +38535,7 @@
       </p:sp>
       <p:sp>
         <p:nvSpPr>
-          <p:cNvPr id="43" name="TextBox 42"/>
+          <p:cNvPr id="47" name="TextBox 46"/>
           <p:cNvSpPr txBox="1"/>
           <p:nvPr/>
         </p:nvSpPr>
@@ -38181,7 +38574,7 @@
       </p:sp>
       <p:sp>
         <p:nvSpPr>
-          <p:cNvPr id="44" name="TextBox 43"/>
+          <p:cNvPr id="48" name="TextBox 47"/>
           <p:cNvSpPr txBox="1"/>
           <p:nvPr/>
         </p:nvSpPr>
